--- a/docs/PV-AgentCore-Leadership.pptx
+++ b/docs/PV-AgentCore-Leadership.pptx
@@ -1482,7 +1482,7 @@
           <a:p>
             <a:r>
               <a:rPr lang="en-US" dirty="0"/>
-              <a:t>The credibility slide. A reproducible, one-command demo stands the stack up, proves 30 checks in ENFORCE mode, and tears down with zero residual. A reusable red-team harness also passes 7/7 — governance holds even when the agent's reasoning is fully adversarial.</a:t>
+              <a:t>The credibility slide. A reproducible, one-command demo stands the stack up, proves 32 checks in ENFORCE mode, and tears down with zero residual. A reusable red-team harness also passes 7/7 — governance holds even when the agent's reasoning is fully adversarial.</a:t>
             </a:r>
             <a:endParaRPr lang="en-US" dirty="0"/>
           </a:p>
@@ -2226,7 +2226,7 @@
                 <a:ea typeface="Calibri" pitchFamily="34" charset="-122"/>
                 <a:cs typeface="Calibri" pitchFamily="34" charset="-120"/>
               </a:rPr>
-              <a:t>30 / 30 live governance checks</a:t>
+              <a:t>32 / 32 live governance checks</a:t>
             </a:r>
             <a:endParaRPr lang="en-US" sz="1200" dirty="0"/>
           </a:p>
@@ -6844,7 +6844,7 @@
                 <a:ea typeface="Calibri" pitchFamily="34" charset="-122"/>
                 <a:cs typeface="Calibri" pitchFamily="34" charset="-120"/>
               </a:rPr>
-              <a:t>Stand up the stack live and walk leadership through the 30-check proof.</a:t>
+              <a:t>Stand up the stack live and walk leadership through the 32-check proof.</a:t>
             </a:r>
             <a:endParaRPr lang="en-US" sz="1150" dirty="0"/>
           </a:p>
@@ -14856,7 +14856,7 @@
                 <a:ea typeface="Cambria" pitchFamily="34" charset="-122"/>
                 <a:cs typeface="Cambria" pitchFamily="34" charset="-120"/>
               </a:rPr>
-              <a:t>Proof, not slideware: 30 / 30 governance checks, live on AWS</a:t>
+              <a:t>Proof, not slideware: 32 / 32 governance checks, live on AWS</a:t>
             </a:r>
             <a:endParaRPr lang="en-US" sz="2700" dirty="0"/>
           </a:p>
@@ -14929,7 +14929,7 @@
                 <a:ea typeface="Cambria" pitchFamily="34" charset="-122"/>
                 <a:cs typeface="Cambria" pitchFamily="34" charset="-120"/>
               </a:rPr>
-              <a:t>30/30</a:t>
+              <a:t>32/32</a:t>
             </a:r>
             <a:endParaRPr lang="en-US" sz="3400" dirty="0"/>
           </a:p>

--- a/docs/PV-AgentCore-Leadership.pptx
+++ b/docs/PV-AgentCore-Leadership.pptx
@@ -6844,7 +6844,7 @@
                 <a:ea typeface="Calibri" pitchFamily="34" charset="-122"/>
                 <a:cs typeface="Calibri" pitchFamily="34" charset="-120"/>
               </a:rPr>
-              <a:t>Stand up the stack live and walk leadership through the 32-check proof.</a:t>
+              <a:t>Stand up the stack live and walk leadership through the clean-account validation evidence.</a:t>
             </a:r>
             <a:endParaRPr lang="en-US" sz="1150" dirty="0"/>
           </a:p>
@@ -14929,7 +14929,7 @@
                 <a:ea typeface="Cambria" pitchFamily="34" charset="-122"/>
                 <a:cs typeface="Cambria" pitchFamily="34" charset="-120"/>
               </a:rPr>
-              <a:t>32/32</a:t>
+              <a:t>144</a:t>
             </a:r>
             <a:endParaRPr lang="en-US" sz="3400" dirty="0"/>
           </a:p>
@@ -14968,7 +14968,7 @@
                 <a:ea typeface="Calibri" pitchFamily="34" charset="-122"/>
                 <a:cs typeface="Calibri" pitchFamily="34" charset="-120"/>
               </a:rPr>
-              <a:t>governance checks pass</a:t>
+              <a:t>offline tests incl. 23 CDK assertions</a:t>
             </a:r>
             <a:endParaRPr lang="en-US" sz="1150" dirty="0"/>
           </a:p>

--- a/docs/PV-AgentCore-Leadership.pptx
+++ b/docs/PV-AgentCore-Leadership.pptx
@@ -14929,7 +14929,7 @@
                 <a:ea typeface="Cambria" pitchFamily="34" charset="-122"/>
                 <a:cs typeface="Cambria" pitchFamily="34" charset="-120"/>
               </a:rPr>
-              <a:t>144</a:t>
+              <a:t>346</a:t>
             </a:r>
             <a:endParaRPr lang="en-US" sz="3400" dirty="0"/>
           </a:p>
@@ -14968,7 +14968,7 @@
                 <a:ea typeface="Calibri" pitchFamily="34" charset="-122"/>
                 <a:cs typeface="Calibri" pitchFamily="34" charset="-120"/>
               </a:rPr>
-              <a:t>offline tests incl. 23 CDK assertions</a:t>
+              <a:t>offline tests incl. 48 CDK assertions</a:t>
             </a:r>
             <a:endParaRPr lang="en-US" sz="1150" dirty="0"/>
           </a:p>
